--- a/ERP与AI融合实践.pptx
+++ b/ERP与AI融合实践.pptx
@@ -4527,7 +4527,7 @@
                   <a:srgbClr val="282523"/>
                 </a:solidFill>
               </a:rPr>
-              <a:t>AI没有替代ERP，而是为ERP增加自然语言业务入口</a:t>
+              <a:t>AI为ERP增加自然语言业务入口</a:t>
             </a:r>
             <a:endParaRPr sz="2325" b="1">
               <a:solidFill>
@@ -8492,7 +8492,7 @@
         <p:spPr>
           <a:xfrm>
             <a:off x="1466850" y="3467100"/>
-            <a:ext cx="2933700" cy="571500"/>
+            <a:ext cx="2934335" cy="692150"/>
           </a:xfrm>
           <a:prstGeom prst="roundRect">
             <a:avLst>
@@ -9891,7 +9891,7 @@
         <p:spPr>
           <a:xfrm>
             <a:off x="685800" y="1581150"/>
-            <a:ext cx="4305300" cy="3648075"/>
+            <a:ext cx="4361180" cy="3859530"/>
           </a:xfrm>
           <a:prstGeom prst="roundRect">
             <a:avLst>
@@ -20499,14 +20499,46 @@
               </a:defRPr>
             </a:pPr>
             <a:r>
-              <a:rPr sz="1350" b="0">
+              <a:rPr lang="zh-CN" sz="1350" b="0">
                 <a:solidFill>
                   <a:srgbClr val="6E635E"/>
                 </a:solidFill>
               </a:rPr>
-              <a:t>聊天发起审批、聊天填写日报</a:t>
-            </a:r>
-            <a:endParaRPr sz="1350" b="0">
+              <a:t>不同功能的</a:t>
+            </a:r>
+            <a:r>
+              <a:rPr lang="en-US" altLang="zh-CN" sz="1350" b="0">
+                <a:solidFill>
+                  <a:srgbClr val="6E635E"/>
+                </a:solidFill>
+              </a:rPr>
+              <a:t>Agent</a:t>
+            </a:r>
+            <a:r>
+              <a:rPr lang="zh-CN" sz="1350" b="0">
+                <a:solidFill>
+                  <a:srgbClr val="6E635E"/>
+                </a:solidFill>
+              </a:rPr>
+              <a:t>和</a:t>
+            </a:r>
+            <a:r>
+              <a:rPr lang="en-US" altLang="zh-CN" sz="1350" b="0">
+                <a:solidFill>
+                  <a:srgbClr val="6E635E"/>
+                </a:solidFill>
+              </a:rPr>
+              <a:t>RAG</a:t>
+            </a:r>
+            <a:r>
+              <a:rPr lang="zh-CN" altLang="en-US" sz="1350" b="0">
+                <a:solidFill>
+                  <a:srgbClr val="6E635E"/>
+                </a:solidFill>
+              </a:rPr>
+              <a:t>问答</a:t>
+            </a:r>
+            <a:endParaRPr lang="zh-CN" altLang="en-US" sz="1350" b="0">
               <a:solidFill>
                 <a:srgbClr val="6E635E"/>
               </a:solidFill>
@@ -20986,7 +21018,39 @@
                   <a:srgbClr val="6E635E"/>
                 </a:solidFill>
               </a:rPr>
-              <a:t>聊天请假、聊天发日报，形成可确认的业务闭环</a:t>
+              <a:t>聊天请假、聊天发日报</a:t>
+            </a:r>
+            <a:r>
+              <a:rPr lang="zh-CN" sz="1350" b="0">
+                <a:solidFill>
+                  <a:srgbClr val="6E635E"/>
+                </a:solidFill>
+              </a:rPr>
+              <a:t>和</a:t>
+            </a:r>
+            <a:r>
+              <a:rPr lang="en-US" altLang="zh-CN" sz="1350" b="0">
+                <a:solidFill>
+                  <a:srgbClr val="6E635E"/>
+                </a:solidFill>
+              </a:rPr>
+              <a:t>RAG</a:t>
+            </a:r>
+            <a:r>
+              <a:rPr lang="zh-CN" altLang="en-US" sz="1350" b="0">
+                <a:solidFill>
+                  <a:srgbClr val="6E635E"/>
+                </a:solidFill>
+              </a:rPr>
+              <a:t>问答</a:t>
+            </a:r>
+            <a:r>
+              <a:rPr sz="1350" b="0">
+                <a:solidFill>
+                  <a:srgbClr val="6E635E"/>
+                </a:solidFill>
+              </a:rPr>
+              <a:t>，形成可确认的业务闭环</a:t>
             </a:r>
             <a:endParaRPr sz="1350" b="0">
               <a:solidFill>
@@ -26026,7 +26090,7 @@
         </p:blipFill>
         <p:spPr>
           <a:xfrm>
-            <a:off x="552450" y="2270459"/>
+            <a:off x="263525" y="2276809"/>
             <a:ext cx="6400800" cy="3060032"/>
           </a:xfrm>
           <a:prstGeom prst="rect">
@@ -30231,7 +30295,7 @@
         </p:nvSpPr>
         <p:spPr>
           <a:xfrm>
-            <a:off x="419100" y="1390650"/>
+            <a:off x="547370" y="1515110"/>
             <a:ext cx="6667500" cy="4819650"/>
           </a:xfrm>
           <a:prstGeom prst="roundRect">
@@ -32346,7 +32410,7 @@
         </p:nvSpPr>
         <p:spPr>
           <a:xfrm>
-            <a:off x="685800" y="1581150"/>
+            <a:off x="767080" y="1585595"/>
             <a:ext cx="4305300" cy="3648075"/>
           </a:xfrm>
           <a:prstGeom prst="roundRect">
@@ -35213,7 +35277,7 @@
         <p:spPr>
           <a:xfrm>
             <a:off x="2076450" y="3781425"/>
-            <a:ext cx="3295650" cy="590550"/>
+            <a:ext cx="3295650" cy="708660"/>
           </a:xfrm>
           <a:prstGeom prst="roundRect">
             <a:avLst>
@@ -36399,7 +36463,7 @@
         </p:blipFill>
         <p:spPr>
           <a:xfrm>
-            <a:off x="0" y="802005"/>
+            <a:off x="0" y="688340"/>
             <a:ext cx="12233910" cy="6055995"/>
           </a:xfrm>
           <a:prstGeom prst="rect">
